--- a/materiais/HIDRO_Oficina_Estudantes.pptx
+++ b/materiais/HIDRO_Oficina_Estudantes.pptx
@@ -941,9 +941,9 @@
 Definições em linguagem simples:
 - Alagamento: água acumulada na rua por chuva forte e drenagem insuficiente ou entupida.
 - Enxurrada: água que escorre rápido e com força, típica de ruas em declive.
-- Enchente (inundação): o rio sobe e transborda para as áreas próximas (planície de inundação).
+- Enchente: o rio sobe dentro do próprio canal, sem transbordar ainda. Se continuar subindo e ultrapassar as margens, vira uma INUNDAÇÃO: a água alcança a planície.
 - Deslizamento: terra, lama ou pedras descem uma encosta, geralmente com solo encharcado.
-Nota para o professor: em textos técnicos brasileiros, "enchente" (ou cheia) é a elevação do nível do rio e "inundação" é o transbordamento; na fala popular, os dois termos costumam ser usados como sinônimos. Neste material usamos "enchente (inundação)".</a:t>
+Nota para o professor: enchente e inundação NÃO são sinônimos. Enchente (ou cheia) é a subida da água dentro do canal do rio; inundação é quando essa água ultrapassa a capacidade do canal e transborda para a planície. Uma enchente pode ou não virar inundação. Reforce essa diferença com a turma.</a:t>
             </a:r>
             <a:endParaRPr lang="en-US" dirty="0"/>
           </a:p>
@@ -5323,7 +5323,7 @@
                 <a:ea typeface="Calibri" pitchFamily="34" charset="-122"/>
                 <a:cs typeface="Calibri" pitchFamily="34" charset="-120"/>
               </a:rPr>
-              <a:t>ENCHENTE (INUNDAÇÃO)</a:t>
+              <a:t>ENCHENTE E INUNDAÇÃO</a:t>
             </a:r>
             <a:endParaRPr lang="en-US" sz="1200" dirty="0"/>
           </a:p>
@@ -5362,7 +5362,7 @@
                 <a:ea typeface="Calibri" pitchFamily="34" charset="-122"/>
                 <a:cs typeface="Calibri" pitchFamily="34" charset="-120"/>
               </a:rPr>
-              <a:t>O rio sobe e transborda para as áreas próximas, a planície de inundação.</a:t>
+              <a:t>O rio sobe dentro do canal (enchente); se ultrapassar as margens, vira inundação e alcança a planície.</a:t>
             </a:r>
             <a:endParaRPr lang="en-US" sz="1400" dirty="0"/>
           </a:p>
@@ -7232,7 +7232,7 @@
                 <a:ea typeface="Calibri" pitchFamily="34" charset="-122"/>
                 <a:cs typeface="Calibri" pitchFamily="34" charset="-120"/>
               </a:rPr>
-              <a:t>Enchente (inundação): o rio sobe e transborda</a:t>
+              <a:t>Enchente e inundação: duas fases, não sinônimos</a:t>
             </a:r>
             <a:endParaRPr lang="en-US" sz="3400" dirty="0"/>
           </a:p>
@@ -7295,7 +7295,7 @@
                 <a:ea typeface="Calibri" pitchFamily="34" charset="-122"/>
                 <a:cs typeface="Calibri" pitchFamily="34" charset="-120"/>
               </a:rPr>
-              <a:t>1 Calha do rio (nível normal)   2 Cheia   3 Transbordamento sobre a planície de inundação</a:t>
+              <a:t>1 Calha do rio (nível normal)   2 Enchente (cheia, ainda dentro do canal)   3 Inundação (transbordamento sobre a planície)</a:t>
             </a:r>
             <a:endParaRPr lang="en-US" sz="1300" dirty="0"/>
           </a:p>

--- a/materiais/HIDRO_Oficina_Estudantes.pptx
+++ b/materiais/HIDRO_Oficina_Estudantes.pptx
@@ -30704,6 +30704,10 @@
             <a:prstDash val="solid"/>
           </a:ln>
         </p:spPr>
+        <p:txBody>
+          <a:bodyPr/>
+          <a:p/>
+        </p:txBody>
       </p:sp>
       <p:sp>
         <p:nvSpPr>
@@ -30741,6 +30745,17 @@
               <a:t>Ilustrações: cenas montadas com os sprites do jogo e diagramas originais. Uso educacional. Licenciamento em definição. Confirme telefones e alertas com a Defesa Civil local.</a:t>
             </a:r>
             <a:endParaRPr lang="en-US" sz="1300" dirty="0"/>
+          </a:p>
+          <a:p>
+            <a:r>
+              <a:rPr sz="1300">
+                <a:solidFill>
+                  <a:srgbClr val="B8CCE6"/>
+                </a:solidFill>
+                <a:latin typeface="Calibri"/>
+              </a:rPr>
+              <a:t>Programa de computador registrado no INPI sob o processo nº BR 51 2026 009207-8, titularidade da UFGD.</a:t>
+            </a:r>
           </a:p>
         </p:txBody>
       </p:sp>
